--- a/Lectures/14-ml-modeling-in-practice.pptx
+++ b/Lectures/14-ml-modeling-in-practice.pptx
@@ -5,7 +5,7 @@
     <p:sldMasterId id="2147483648" r:id="rId1"/>
   </p:sldMasterIdLst>
   <p:notesMasterIdLst>
-    <p:notesMasterId r:id="rId11"/>
+    <p:notesMasterId r:id="rId12"/>
   </p:notesMasterIdLst>
   <p:sldIdLst>
     <p:sldId id="256" r:id="rId2"/>
@@ -16,7 +16,8 @@
     <p:sldId id="502" r:id="rId7"/>
     <p:sldId id="434" r:id="rId8"/>
     <p:sldId id="503" r:id="rId9"/>
-    <p:sldId id="504" r:id="rId10"/>
+    <p:sldId id="506" r:id="rId10"/>
+    <p:sldId id="505" r:id="rId11"/>
   </p:sldIdLst>
   <p:sldSz cx="12192000" cy="6858000"/>
   <p:notesSz cx="6858000" cy="9144000"/>
@@ -254,7 +255,7 @@
       <p15:sldGuideLst xmlns:p15="http://schemas.microsoft.com/office/powerpoint/2012/main"/>
     </p:ext>
     <p:ext uri="http://customooxmlschemas.google.com/">
-      <go:slidesCustomData xmlns:go="http://customooxmlschemas.google.com/" xmlns:p15="http://schemas.microsoft.com/office/powerpoint/2012/main" xmlns:p14="http://schemas.microsoft.com/office/powerpoint/2010/main" xmlns:com="http://schemas.openxmlformats.org/drawingml/2006/compatibility" xmlns:pvml="urn:schemas-microsoft-com:office:powerpoint" xmlns:v="urn:schemas-microsoft-com:vml" xmlns:o="urn:schemas-microsoft-com:office:office" xmlns:dgm="http://schemas.openxmlformats.org/drawingml/2006/diagram" xmlns:c="http://schemas.openxmlformats.org/drawingml/2006/chart" xmlns:mv="urn:schemas-microsoft-com:mac:vml" xmlns:mc="http://schemas.openxmlformats.org/markup-compatibility/2006" xmlns="" r:id="rId54" roundtripDataSignature="AMtx7mjFyVUGRZWio+dc9dxzYsimUxNJbg=="/>
+      <go:slidesCustomData xmlns="" xmlns:mc="http://schemas.openxmlformats.org/markup-compatibility/2006" xmlns:mv="urn:schemas-microsoft-com:mac:vml" xmlns:c="http://schemas.openxmlformats.org/drawingml/2006/chart" xmlns:dgm="http://schemas.openxmlformats.org/drawingml/2006/diagram" xmlns:o="urn:schemas-microsoft-com:office:office" xmlns:v="urn:schemas-microsoft-com:vml" xmlns:pvml="urn:schemas-microsoft-com:office:powerpoint" xmlns:com="http://schemas.openxmlformats.org/drawingml/2006/compatibility" xmlns:p14="http://schemas.microsoft.com/office/powerpoint/2010/main" xmlns:p15="http://schemas.microsoft.com/office/powerpoint/2012/main" xmlns:go="http://customooxmlschemas.google.com/" r:id="rId54" roundtripDataSignature="AMtx7mjFyVUGRZWio+dc9dxzYsimUxNJbg=="/>
     </p:ext>
   </p:extLst>
 </p:presentation>
@@ -10279,9 +10280,9 @@
                   <a:srgbClr val="595959"/>
                 </a:solidFill>
               </a:rPr>
-              <a:t>Rayid Ghani and Kit Rodolfa</a:t>
+              <a:t>Rayid Ghani</a:t>
             </a:r>
-            <a:endParaRPr sz="2800">
+            <a:endParaRPr sz="2800" dirty="0">
               <a:solidFill>
                 <a:srgbClr val="595959"/>
               </a:solidFill>
@@ -10318,6 +10319,141 @@
         </p:spPr>
       </p:pic>
     </p:spTree>
+  </p:cSld>
+  <p:clrMapOvr>
+    <a:masterClrMapping/>
+  </p:clrMapOvr>
+</p:sld>
+</file>
+
+<file path=ppt/slides/slide10.xml><?xml version="1.0" encoding="utf-8"?>
+<p:sld xmlns:a="http://schemas.openxmlformats.org/drawingml/2006/main" xmlns:r="http://schemas.openxmlformats.org/officeDocument/2006/relationships" xmlns:p="http://schemas.openxmlformats.org/presentationml/2006/main">
+  <p:cSld>
+    <p:spTree>
+      <p:nvGrpSpPr>
+        <p:cNvPr id="1" name="">
+          <a:extLst>
+            <a:ext uri="{FF2B5EF4-FFF2-40B4-BE49-F238E27FC236}">
+              <a16:creationId xmlns:a16="http://schemas.microsoft.com/office/drawing/2014/main" id="{17DDDC56-779D-8067-8C44-915256654127}"/>
+            </a:ext>
+          </a:extLst>
+        </p:cNvPr>
+        <p:cNvGrpSpPr/>
+        <p:nvPr/>
+      </p:nvGrpSpPr>
+      <p:grpSpPr>
+        <a:xfrm>
+          <a:off x="0" y="0"/>
+          <a:ext cx="0" cy="0"/>
+          <a:chOff x="0" y="0"/>
+          <a:chExt cx="0" cy="0"/>
+        </a:xfrm>
+      </p:grpSpPr>
+      <p:sp>
+        <p:nvSpPr>
+          <p:cNvPr id="3" name="Title 2">
+            <a:extLst>
+              <a:ext uri="{FF2B5EF4-FFF2-40B4-BE49-F238E27FC236}">
+                <a16:creationId xmlns:a16="http://schemas.microsoft.com/office/drawing/2014/main" id="{BD03BEA5-D34F-E7EC-C712-D4E2B4491A47}"/>
+              </a:ext>
+            </a:extLst>
+          </p:cNvPr>
+          <p:cNvSpPr>
+            <a:spLocks noGrp="1"/>
+          </p:cNvSpPr>
+          <p:nvPr>
+            <p:ph type="title"/>
+          </p:nvPr>
+        </p:nvSpPr>
+        <p:spPr/>
+        <p:txBody>
+          <a:bodyPr/>
+          <a:lstStyle/>
+          <a:p>
+            <a:r>
+              <a:rPr lang="en-US" dirty="0"/>
+              <a:t>Reminders</a:t>
+            </a:r>
+          </a:p>
+        </p:txBody>
+      </p:sp>
+      <p:sp>
+        <p:nvSpPr>
+          <p:cNvPr id="5" name="Text Placeholder 4">
+            <a:extLst>
+              <a:ext uri="{FF2B5EF4-FFF2-40B4-BE49-F238E27FC236}">
+                <a16:creationId xmlns:a16="http://schemas.microsoft.com/office/drawing/2014/main" id="{03A4F301-6D58-82E9-66A6-0125BFF9A5D8}"/>
+              </a:ext>
+            </a:extLst>
+          </p:cNvPr>
+          <p:cNvSpPr>
+            <a:spLocks noGrp="1"/>
+          </p:cNvSpPr>
+          <p:nvPr>
+            <p:ph type="body" idx="1"/>
+          </p:nvPr>
+        </p:nvSpPr>
+        <p:spPr/>
+        <p:txBody>
+          <a:bodyPr/>
+          <a:lstStyle/>
+          <a:p>
+            <a:pPr marL="76200" indent="0">
+              <a:buNone/>
+            </a:pPr>
+            <a:r>
+              <a:rPr lang="en-US" b="1" dirty="0"/>
+              <a:t>This week:</a:t>
+            </a:r>
+            <a:endParaRPr lang="en-US" dirty="0"/>
+          </a:p>
+          <a:p>
+            <a:r>
+              <a:rPr lang="en-US" dirty="0"/>
+              <a:t>Wednesday team check-ins</a:t>
+            </a:r>
+          </a:p>
+          <a:p>
+            <a:r>
+              <a:rPr lang="en-US" dirty="0"/>
+              <a:t>Thursday  - project work time</a:t>
+            </a:r>
+          </a:p>
+          <a:p>
+            <a:pPr marL="76200" indent="0">
+              <a:buNone/>
+            </a:pPr>
+            <a:endParaRPr lang="en-US" dirty="0"/>
+          </a:p>
+          <a:p>
+            <a:pPr marL="76200" indent="0">
+              <a:buNone/>
+            </a:pPr>
+            <a:r>
+              <a:rPr lang="en-US" b="1" dirty="0"/>
+              <a:t>Coming up next week:</a:t>
+            </a:r>
+          </a:p>
+          <a:p>
+            <a:r>
+              <a:rPr lang="en-US" dirty="0"/>
+              <a:t>Monday: Update 3 (on Canvas): Initial ML results and planned model grid</a:t>
+            </a:r>
+          </a:p>
+          <a:p>
+            <a:r>
+              <a:rPr lang="en-US" dirty="0"/>
+              <a:t>Tuesday: Feedback Form</a:t>
+            </a:r>
+          </a:p>
+        </p:txBody>
+      </p:sp>
+    </p:spTree>
+    <p:extLst>
+      <p:ext uri="{BB962C8B-B14F-4D97-AF65-F5344CB8AC3E}">
+        <p14:creationId xmlns:p14="http://schemas.microsoft.com/office/powerpoint/2010/main" val="3230997589"/>
+      </p:ext>
+    </p:extLst>
   </p:cSld>
   <p:clrMapOvr>
     <a:masterClrMapping/>
@@ -10430,7 +10566,7 @@
           <a:p>
             <a:r>
               <a:rPr lang="en-US" dirty="0"/>
-              <a:t>Monday: Update 3 (on Canvas): v0 Baseline Results and Features</a:t>
+              <a:t>Monday: Update 3 (on Canvas): Initial ML results and planned model grid</a:t>
             </a:r>
           </a:p>
           <a:p>
@@ -10567,7 +10703,7 @@
             <a:pPr lvl="1"/>
             <a:r>
               <a:rPr lang="en-US" dirty="0"/>
-              <a:t>Preliminary run of minimal models + appropriate baselines</a:t>
+              <a:t>Preliminary run of minimal models + updating baselines</a:t>
             </a:r>
           </a:p>
         </p:txBody>
@@ -11325,10 +11461,59 @@
       </p:grpSpPr>
       <p:sp>
         <p:nvSpPr>
+          <p:cNvPr id="2" name="Text Placeholder 1">
+            <a:extLst>
+              <a:ext uri="{FF2B5EF4-FFF2-40B4-BE49-F238E27FC236}">
+                <a16:creationId xmlns:a16="http://schemas.microsoft.com/office/drawing/2014/main" id="{00F0DDFE-F043-C883-7372-2746F25C0758}"/>
+              </a:ext>
+            </a:extLst>
+          </p:cNvPr>
+          <p:cNvSpPr>
+            <a:spLocks noGrp="1"/>
+          </p:cNvSpPr>
+          <p:nvPr>
+            <p:ph type="body" idx="1"/>
+          </p:nvPr>
+        </p:nvSpPr>
+        <p:spPr/>
+        <p:txBody>
+          <a:bodyPr/>
+          <a:lstStyle/>
+          <a:p>
+            <a:r>
+              <a:rPr lang="en-US" dirty="0"/>
+              <a:t>https://</a:t>
+            </a:r>
+            <a:r>
+              <a:rPr lang="en-US" dirty="0" err="1"/>
+              <a:t>dssg.github.io</a:t>
+            </a:r>
+            <a:r>
+              <a:rPr lang="en-US" dirty="0"/>
+              <a:t>/</a:t>
+            </a:r>
+            <a:r>
+              <a:rPr lang="en-US" dirty="0" err="1"/>
+              <a:t>triage_cookbook</a:t>
+            </a:r>
+            <a:r>
+              <a:rPr lang="en-US" dirty="0"/>
+              <a:t>/</a:t>
+            </a:r>
+            <a:r>
+              <a:rPr lang="en-US" dirty="0" err="1"/>
+              <a:t>looking_for_results.html</a:t>
+            </a:r>
+            <a:endParaRPr lang="en-US" dirty="0"/>
+          </a:p>
+        </p:txBody>
+      </p:sp>
+      <p:sp>
+        <p:nvSpPr>
           <p:cNvPr id="3" name="Title 2">
             <a:extLst>
               <a:ext uri="{FF2B5EF4-FFF2-40B4-BE49-F238E27FC236}">
-                <a16:creationId xmlns:a16="http://schemas.microsoft.com/office/drawing/2014/main" id="{9323871C-7CA8-1448-8FFC-1AE6E1838941}"/>
+                <a16:creationId xmlns:a16="http://schemas.microsoft.com/office/drawing/2014/main" id="{FEAD3358-5B61-4276-BCC3-59A152DD3FD2}"/>
               </a:ext>
             </a:extLst>
           </p:cNvPr>
@@ -11346,91 +11531,15 @@
           <a:p>
             <a:r>
               <a:rPr lang="en-US" dirty="0"/>
-              <a:t>Reminders</a:t>
+              <a:t>Looking for results</a:t>
             </a:r>
-          </a:p>
-        </p:txBody>
-      </p:sp>
-      <p:sp>
-        <p:nvSpPr>
-          <p:cNvPr id="5" name="Text Placeholder 4">
-            <a:extLst>
-              <a:ext uri="{FF2B5EF4-FFF2-40B4-BE49-F238E27FC236}">
-                <a16:creationId xmlns:a16="http://schemas.microsoft.com/office/drawing/2014/main" id="{F4E0A5F0-1D89-954D-91FB-596CD9E690F2}"/>
-              </a:ext>
-            </a:extLst>
-          </p:cNvPr>
-          <p:cNvSpPr>
-            <a:spLocks noGrp="1"/>
-          </p:cNvSpPr>
-          <p:nvPr>
-            <p:ph type="body" idx="1"/>
-          </p:nvPr>
-        </p:nvSpPr>
-        <p:spPr/>
-        <p:txBody>
-          <a:bodyPr/>
-          <a:lstStyle/>
-          <a:p>
-            <a:pPr marL="76200" indent="0">
-              <a:buNone/>
-            </a:pPr>
-            <a:r>
-              <a:rPr lang="en-US" b="1" dirty="0"/>
-              <a:t>This week:</a:t>
-            </a:r>
-            <a:endParaRPr lang="en-US" dirty="0"/>
-          </a:p>
-          <a:p>
-            <a:r>
-              <a:rPr lang="en-US" dirty="0"/>
-              <a:t>Wednesday team check-ins</a:t>
-            </a:r>
-          </a:p>
-          <a:p>
-            <a:r>
-              <a:rPr lang="en-US" dirty="0"/>
-              <a:t>Thursday </a:t>
-            </a:r>
-          </a:p>
-          <a:p>
-            <a:pPr marL="76200" indent="0">
-              <a:buNone/>
-            </a:pPr>
-            <a:endParaRPr lang="en-US" dirty="0"/>
-          </a:p>
-          <a:p>
-            <a:pPr marL="76200" indent="0">
-              <a:buNone/>
-            </a:pPr>
-            <a:r>
-              <a:rPr lang="en-US" b="1" dirty="0"/>
-              <a:t>Coming up next week:</a:t>
-            </a:r>
-          </a:p>
-          <a:p>
-            <a:r>
-              <a:rPr lang="en-US" dirty="0"/>
-              <a:t>Monday: Update 3 (on Canvas): v0 Baseline Results and Features</a:t>
-            </a:r>
-          </a:p>
-          <a:p>
-            <a:r>
-              <a:rPr lang="en-US" dirty="0"/>
-              <a:t>Tuesday: </a:t>
-            </a:r>
-            <a:r>
-              <a:rPr lang="en-US"/>
-              <a:t>Feedback Form</a:t>
-            </a:r>
-            <a:endParaRPr lang="en-US" dirty="0"/>
           </a:p>
         </p:txBody>
       </p:sp>
     </p:spTree>
     <p:extLst>
       <p:ext uri="{BB962C8B-B14F-4D97-AF65-F5344CB8AC3E}">
-        <p14:creationId xmlns:p14="http://schemas.microsoft.com/office/powerpoint/2010/main" val="2158547317"/>
+        <p14:creationId xmlns:p14="http://schemas.microsoft.com/office/powerpoint/2010/main" val="3221017053"/>
       </p:ext>
     </p:extLst>
   </p:cSld>
